--- a/github/workflows/Hyein/figures_for_paper/range_specific_manual_combine.pptx
+++ b/github/workflows/Hyein/figures_for_paper/range_specific_manual_combine.pptx
@@ -104,6 +104,11 @@
       </a:defRPr>
     </a:lvl9pPr>
   </p:defaultTextStyle>
+  <p:extLst>
+    <p:ext uri="{EFAFB233-063F-42B5-8137-9DF3F51BA10A}">
+      <p15:sldGuideLst xmlns:p15="http://schemas.microsoft.com/office/powerpoint/2012/main"/>
+    </p:ext>
+  </p:extLst>
 </p:presentation>
 </file>
 

--- a/github/workflows/Hyein/figures_for_paper/range_specific_manual_combine.pptx
+++ b/github/workflows/Hyein/figures_for_paper/range_specific_manual_combine.pptx
@@ -6,6 +6,7 @@
   </p:sldMasterIdLst>
   <p:sldIdLst>
     <p:sldId id="256" r:id="rId2"/>
+    <p:sldId id="257" r:id="rId3"/>
   </p:sldIdLst>
   <p:sldSz cx="12192000" cy="6858000"/>
   <p:notesSz cx="6858000" cy="9144000"/>
@@ -259,7 +260,7 @@
           <a:p>
             <a:fld id="{2CA9D015-5E40-4BA9-A948-5D4F8D4F01D1}" type="datetimeFigureOut">
               <a:rPr lang="ko-KR" altLang="en-US" smtClean="0"/>
-              <a:t>2026-05-27</a:t>
+              <a:t>2026-05-28</a:t>
             </a:fld>
             <a:endParaRPr lang="ko-KR" altLang="en-US"/>
           </a:p>
@@ -457,7 +458,7 @@
           <a:p>
             <a:fld id="{2CA9D015-5E40-4BA9-A948-5D4F8D4F01D1}" type="datetimeFigureOut">
               <a:rPr lang="ko-KR" altLang="en-US" smtClean="0"/>
-              <a:t>2026-05-27</a:t>
+              <a:t>2026-05-28</a:t>
             </a:fld>
             <a:endParaRPr lang="ko-KR" altLang="en-US"/>
           </a:p>
@@ -665,7 +666,7 @@
           <a:p>
             <a:fld id="{2CA9D015-5E40-4BA9-A948-5D4F8D4F01D1}" type="datetimeFigureOut">
               <a:rPr lang="ko-KR" altLang="en-US" smtClean="0"/>
-              <a:t>2026-05-27</a:t>
+              <a:t>2026-05-28</a:t>
             </a:fld>
             <a:endParaRPr lang="ko-KR" altLang="en-US"/>
           </a:p>
@@ -863,7 +864,7 @@
           <a:p>
             <a:fld id="{2CA9D015-5E40-4BA9-A948-5D4F8D4F01D1}" type="datetimeFigureOut">
               <a:rPr lang="ko-KR" altLang="en-US" smtClean="0"/>
-              <a:t>2026-05-27</a:t>
+              <a:t>2026-05-28</a:t>
             </a:fld>
             <a:endParaRPr lang="ko-KR" altLang="en-US"/>
           </a:p>
@@ -1138,7 +1139,7 @@
           <a:p>
             <a:fld id="{2CA9D015-5E40-4BA9-A948-5D4F8D4F01D1}" type="datetimeFigureOut">
               <a:rPr lang="ko-KR" altLang="en-US" smtClean="0"/>
-              <a:t>2026-05-27</a:t>
+              <a:t>2026-05-28</a:t>
             </a:fld>
             <a:endParaRPr lang="ko-KR" altLang="en-US"/>
           </a:p>
@@ -1403,7 +1404,7 @@
           <a:p>
             <a:fld id="{2CA9D015-5E40-4BA9-A948-5D4F8D4F01D1}" type="datetimeFigureOut">
               <a:rPr lang="ko-KR" altLang="en-US" smtClean="0"/>
-              <a:t>2026-05-27</a:t>
+              <a:t>2026-05-28</a:t>
             </a:fld>
             <a:endParaRPr lang="ko-KR" altLang="en-US"/>
           </a:p>
@@ -1815,7 +1816,7 @@
           <a:p>
             <a:fld id="{2CA9D015-5E40-4BA9-A948-5D4F8D4F01D1}" type="datetimeFigureOut">
               <a:rPr lang="ko-KR" altLang="en-US" smtClean="0"/>
-              <a:t>2026-05-27</a:t>
+              <a:t>2026-05-28</a:t>
             </a:fld>
             <a:endParaRPr lang="ko-KR" altLang="en-US"/>
           </a:p>
@@ -1956,7 +1957,7 @@
           <a:p>
             <a:fld id="{2CA9D015-5E40-4BA9-A948-5D4F8D4F01D1}" type="datetimeFigureOut">
               <a:rPr lang="ko-KR" altLang="en-US" smtClean="0"/>
-              <a:t>2026-05-27</a:t>
+              <a:t>2026-05-28</a:t>
             </a:fld>
             <a:endParaRPr lang="ko-KR" altLang="en-US"/>
           </a:p>
@@ -2069,7 +2070,7 @@
           <a:p>
             <a:fld id="{2CA9D015-5E40-4BA9-A948-5D4F8D4F01D1}" type="datetimeFigureOut">
               <a:rPr lang="ko-KR" altLang="en-US" smtClean="0"/>
-              <a:t>2026-05-27</a:t>
+              <a:t>2026-05-28</a:t>
             </a:fld>
             <a:endParaRPr lang="ko-KR" altLang="en-US"/>
           </a:p>
@@ -2380,7 +2381,7 @@
           <a:p>
             <a:fld id="{2CA9D015-5E40-4BA9-A948-5D4F8D4F01D1}" type="datetimeFigureOut">
               <a:rPr lang="ko-KR" altLang="en-US" smtClean="0"/>
-              <a:t>2026-05-27</a:t>
+              <a:t>2026-05-28</a:t>
             </a:fld>
             <a:endParaRPr lang="ko-KR" altLang="en-US"/>
           </a:p>
@@ -2668,7 +2669,7 @@
           <a:p>
             <a:fld id="{2CA9D015-5E40-4BA9-A948-5D4F8D4F01D1}" type="datetimeFigureOut">
               <a:rPr lang="ko-KR" altLang="en-US" smtClean="0"/>
-              <a:t>2026-05-27</a:t>
+              <a:t>2026-05-28</a:t>
             </a:fld>
             <a:endParaRPr lang="ko-KR" altLang="en-US"/>
           </a:p>
@@ -2909,7 +2910,7 @@
           <a:p>
             <a:fld id="{2CA9D015-5E40-4BA9-A948-5D4F8D4F01D1}" type="datetimeFigureOut">
               <a:rPr lang="ko-KR" altLang="en-US" smtClean="0"/>
-              <a:t>2026-05-27</a:t>
+              <a:t>2026-05-28</a:t>
             </a:fld>
             <a:endParaRPr lang="ko-KR" altLang="en-US"/>
           </a:p>
@@ -3789,6 +3790,642 @@
 </p:sld>
 </file>
 
+<file path=ppt/slides/slide2.xml><?xml version="1.0" encoding="utf-8"?>
+<p:sld xmlns:a="http://schemas.openxmlformats.org/drawingml/2006/main" xmlns:r="http://schemas.openxmlformats.org/officeDocument/2006/relationships" xmlns:p="http://schemas.openxmlformats.org/presentationml/2006/main">
+  <p:cSld>
+    <p:spTree>
+      <p:nvGrpSpPr>
+        <p:cNvPr id="1" name=""/>
+        <p:cNvGrpSpPr/>
+        <p:nvPr/>
+      </p:nvGrpSpPr>
+      <p:grpSpPr>
+        <a:xfrm>
+          <a:off x="0" y="0"/>
+          <a:ext cx="0" cy="0"/>
+          <a:chOff x="0" y="0"/>
+          <a:chExt cx="0" cy="0"/>
+        </a:xfrm>
+      </p:grpSpPr>
+      <p:pic>
+        <p:nvPicPr>
+          <p:cNvPr id="599" name="그림 598">
+            <a:extLst>
+              <a:ext uri="{FF2B5EF4-FFF2-40B4-BE49-F238E27FC236}">
+                <a16:creationId xmlns:a16="http://schemas.microsoft.com/office/drawing/2014/main" id="{CF6E779C-3DFC-48CA-84EF-D9E32AEC04EE}"/>
+              </a:ext>
+            </a:extLst>
+          </p:cNvPr>
+          <p:cNvPicPr>
+            <a:picLocks noChangeAspect="1"/>
+          </p:cNvPicPr>
+          <p:nvPr/>
+        </p:nvPicPr>
+        <p:blipFill>
+          <a:blip r:embed="rId2">
+            <a:extLst>
+              <a:ext uri="{28A0092B-C50C-407E-A947-70E740481C1C}">
+                <a14:useLocalDpi xmlns:a14="http://schemas.microsoft.com/office/drawing/2010/main" val="0"/>
+              </a:ext>
+            </a:extLst>
+          </a:blip>
+          <a:stretch>
+            <a:fillRect/>
+          </a:stretch>
+        </p:blipFill>
+        <p:spPr>
+          <a:xfrm>
+            <a:off x="-1551444" y="4214145"/>
+            <a:ext cx="3724348" cy="1590924"/>
+          </a:xfrm>
+          <a:prstGeom prst="rect">
+            <a:avLst/>
+          </a:prstGeom>
+        </p:spPr>
+      </p:pic>
+      <p:pic>
+        <p:nvPicPr>
+          <p:cNvPr id="601" name="그림 600">
+            <a:extLst>
+              <a:ext uri="{FF2B5EF4-FFF2-40B4-BE49-F238E27FC236}">
+                <a16:creationId xmlns:a16="http://schemas.microsoft.com/office/drawing/2014/main" id="{DB89CA84-9F92-4972-A189-337644EE3179}"/>
+              </a:ext>
+            </a:extLst>
+          </p:cNvPr>
+          <p:cNvPicPr>
+            <a:picLocks noChangeAspect="1"/>
+          </p:cNvPicPr>
+          <p:nvPr/>
+        </p:nvPicPr>
+        <p:blipFill>
+          <a:blip r:embed="rId3">
+            <a:extLst>
+              <a:ext uri="{28A0092B-C50C-407E-A947-70E740481C1C}">
+                <a14:useLocalDpi xmlns:a14="http://schemas.microsoft.com/office/drawing/2010/main" val="0"/>
+              </a:ext>
+            </a:extLst>
+          </a:blip>
+          <a:stretch>
+            <a:fillRect/>
+          </a:stretch>
+        </p:blipFill>
+        <p:spPr>
+          <a:xfrm>
+            <a:off x="-1578366" y="332863"/>
+            <a:ext cx="3724348" cy="2998984"/>
+          </a:xfrm>
+          <a:prstGeom prst="rect">
+            <a:avLst/>
+          </a:prstGeom>
+        </p:spPr>
+      </p:pic>
+      <p:pic>
+        <p:nvPicPr>
+          <p:cNvPr id="33" name="그림 32">
+            <a:extLst>
+              <a:ext uri="{FF2B5EF4-FFF2-40B4-BE49-F238E27FC236}">
+                <a16:creationId xmlns:a16="http://schemas.microsoft.com/office/drawing/2014/main" id="{0212B28C-DCC7-40FE-BE59-C4DAAC0FFD55}"/>
+              </a:ext>
+            </a:extLst>
+          </p:cNvPr>
+          <p:cNvPicPr>
+            <a:picLocks noChangeAspect="1"/>
+          </p:cNvPicPr>
+          <p:nvPr/>
+        </p:nvPicPr>
+        <p:blipFill rotWithShape="1">
+          <a:blip r:embed="rId4">
+            <a:extLst>
+              <a:ext uri="{28A0092B-C50C-407E-A947-70E740481C1C}">
+                <a14:useLocalDpi xmlns:a14="http://schemas.microsoft.com/office/drawing/2010/main" val="0"/>
+              </a:ext>
+            </a:extLst>
+          </a:blip>
+          <a:srcRect r="48435"/>
+          <a:stretch/>
+        </p:blipFill>
+        <p:spPr>
+          <a:xfrm>
+            <a:off x="5995381" y="582162"/>
+            <a:ext cx="3825538" cy="2846838"/>
+          </a:xfrm>
+          <a:prstGeom prst="rect">
+            <a:avLst/>
+          </a:prstGeom>
+        </p:spPr>
+      </p:pic>
+      <p:pic>
+        <p:nvPicPr>
+          <p:cNvPr id="35" name="그림 34">
+            <a:extLst>
+              <a:ext uri="{FF2B5EF4-FFF2-40B4-BE49-F238E27FC236}">
+                <a16:creationId xmlns:a16="http://schemas.microsoft.com/office/drawing/2014/main" id="{F510F4D6-AAFB-4A5B-A290-1DFBEDE2EFFF}"/>
+              </a:ext>
+            </a:extLst>
+          </p:cNvPr>
+          <p:cNvPicPr>
+            <a:picLocks noChangeAspect="1"/>
+          </p:cNvPicPr>
+          <p:nvPr/>
+        </p:nvPicPr>
+        <p:blipFill rotWithShape="1">
+          <a:blip r:embed="rId5">
+            <a:extLst>
+              <a:ext uri="{28A0092B-C50C-407E-A947-70E740481C1C}">
+                <a14:useLocalDpi xmlns:a14="http://schemas.microsoft.com/office/drawing/2010/main" val="0"/>
+              </a:ext>
+            </a:extLst>
+          </a:blip>
+          <a:srcRect r="50000" b="50000"/>
+          <a:stretch/>
+        </p:blipFill>
+        <p:spPr>
+          <a:xfrm>
+            <a:off x="2199826" y="582162"/>
+            <a:ext cx="3778192" cy="2846838"/>
+          </a:xfrm>
+          <a:prstGeom prst="rect">
+            <a:avLst/>
+          </a:prstGeom>
+        </p:spPr>
+      </p:pic>
+      <p:pic>
+        <p:nvPicPr>
+          <p:cNvPr id="41" name="그림 40">
+            <a:extLst>
+              <a:ext uri="{FF2B5EF4-FFF2-40B4-BE49-F238E27FC236}">
+                <a16:creationId xmlns:a16="http://schemas.microsoft.com/office/drawing/2014/main" id="{37E12EA0-9487-451C-9A56-4A4D5362B126}"/>
+              </a:ext>
+            </a:extLst>
+          </p:cNvPr>
+          <p:cNvPicPr>
+            <a:picLocks noChangeAspect="1"/>
+          </p:cNvPicPr>
+          <p:nvPr/>
+        </p:nvPicPr>
+        <p:blipFill>
+          <a:blip r:embed="rId6">
+            <a:extLst>
+              <a:ext uri="{28A0092B-C50C-407E-A947-70E740481C1C}">
+                <a14:useLocalDpi xmlns:a14="http://schemas.microsoft.com/office/drawing/2010/main" val="0"/>
+              </a:ext>
+            </a:extLst>
+          </a:blip>
+          <a:srcRect/>
+          <a:stretch/>
+        </p:blipFill>
+        <p:spPr>
+          <a:xfrm>
+            <a:off x="9838283" y="582162"/>
+            <a:ext cx="3782695" cy="2846838"/>
+          </a:xfrm>
+          <a:prstGeom prst="rect">
+            <a:avLst/>
+          </a:prstGeom>
+        </p:spPr>
+      </p:pic>
+      <p:pic>
+        <p:nvPicPr>
+          <p:cNvPr id="68" name="그래픽 67">
+            <a:extLst>
+              <a:ext uri="{FF2B5EF4-FFF2-40B4-BE49-F238E27FC236}">
+                <a16:creationId xmlns:a16="http://schemas.microsoft.com/office/drawing/2014/main" id="{201A60A4-CA0B-4D9D-AE76-85C47A7F3F83}"/>
+              </a:ext>
+            </a:extLst>
+          </p:cNvPr>
+          <p:cNvPicPr>
+            <a:picLocks noChangeAspect="1"/>
+          </p:cNvPicPr>
+          <p:nvPr/>
+        </p:nvPicPr>
+        <p:blipFill>
+          <a:blip r:embed="rId7">
+            <a:extLst>
+              <a:ext uri="{28A0092B-C50C-407E-A947-70E740481C1C}">
+                <a14:useLocalDpi xmlns:a14="http://schemas.microsoft.com/office/drawing/2010/main" val="0"/>
+              </a:ext>
+              <a:ext uri="{96DAC541-7B7A-43D3-8B79-37D633B846F1}">
+                <asvg:svgBlip xmlns:asvg="http://schemas.microsoft.com/office/drawing/2016/SVG/main" r:embed="rId8"/>
+              </a:ext>
+            </a:extLst>
+          </a:blip>
+          <a:stretch>
+            <a:fillRect/>
+          </a:stretch>
+        </p:blipFill>
+        <p:spPr>
+          <a:xfrm>
+            <a:off x="9838283" y="3586188"/>
+            <a:ext cx="3829919" cy="2846838"/>
+          </a:xfrm>
+          <a:prstGeom prst="rect">
+            <a:avLst/>
+          </a:prstGeom>
+        </p:spPr>
+      </p:pic>
+      <p:pic>
+        <p:nvPicPr>
+          <p:cNvPr id="589" name="그림 588">
+            <a:extLst>
+              <a:ext uri="{FF2B5EF4-FFF2-40B4-BE49-F238E27FC236}">
+                <a16:creationId xmlns:a16="http://schemas.microsoft.com/office/drawing/2014/main" id="{91B3CF1A-68AF-4980-9946-7BAFDE7427C7}"/>
+              </a:ext>
+            </a:extLst>
+          </p:cNvPr>
+          <p:cNvPicPr>
+            <a:picLocks noChangeAspect="1"/>
+          </p:cNvPicPr>
+          <p:nvPr/>
+        </p:nvPicPr>
+        <p:blipFill rotWithShape="1">
+          <a:blip r:embed="rId9">
+            <a:extLst>
+              <a:ext uri="{28A0092B-C50C-407E-A947-70E740481C1C}">
+                <a14:useLocalDpi xmlns:a14="http://schemas.microsoft.com/office/drawing/2010/main" val="0"/>
+              </a:ext>
+            </a:extLst>
+          </a:blip>
+          <a:srcRect r="48435"/>
+          <a:stretch/>
+        </p:blipFill>
+        <p:spPr>
+          <a:xfrm>
+            <a:off x="5978018" y="3586188"/>
+            <a:ext cx="3825538" cy="2846838"/>
+          </a:xfrm>
+          <a:prstGeom prst="rect">
+            <a:avLst/>
+          </a:prstGeom>
+        </p:spPr>
+      </p:pic>
+      <p:pic>
+        <p:nvPicPr>
+          <p:cNvPr id="593" name="그림 592">
+            <a:extLst>
+              <a:ext uri="{FF2B5EF4-FFF2-40B4-BE49-F238E27FC236}">
+                <a16:creationId xmlns:a16="http://schemas.microsoft.com/office/drawing/2014/main" id="{CC4759EA-03A1-4BC4-837E-253AEE70FB64}"/>
+              </a:ext>
+            </a:extLst>
+          </p:cNvPr>
+          <p:cNvPicPr>
+            <a:picLocks noChangeAspect="1"/>
+          </p:cNvPicPr>
+          <p:nvPr/>
+        </p:nvPicPr>
+        <p:blipFill rotWithShape="1">
+          <a:blip r:embed="rId10">
+            <a:extLst>
+              <a:ext uri="{28A0092B-C50C-407E-A947-70E740481C1C}">
+                <a14:useLocalDpi xmlns:a14="http://schemas.microsoft.com/office/drawing/2010/main" val="0"/>
+              </a:ext>
+            </a:extLst>
+          </a:blip>
+          <a:srcRect r="50000"/>
+          <a:stretch/>
+        </p:blipFill>
+        <p:spPr>
+          <a:xfrm>
+            <a:off x="2199826" y="3460176"/>
+            <a:ext cx="3709424" cy="3098862"/>
+          </a:xfrm>
+          <a:prstGeom prst="rect">
+            <a:avLst/>
+          </a:prstGeom>
+        </p:spPr>
+      </p:pic>
+      <p:sp>
+        <p:nvSpPr>
+          <p:cNvPr id="42" name="TextBox 41">
+            <a:extLst>
+              <a:ext uri="{FF2B5EF4-FFF2-40B4-BE49-F238E27FC236}">
+                <a16:creationId xmlns:a16="http://schemas.microsoft.com/office/drawing/2014/main" id="{33455AC2-74AD-4005-A4B6-A10336DBDE02}"/>
+              </a:ext>
+            </a:extLst>
+          </p:cNvPr>
+          <p:cNvSpPr txBox="1"/>
+          <p:nvPr/>
+        </p:nvSpPr>
+        <p:spPr>
+          <a:xfrm>
+            <a:off x="-1726024" y="336074"/>
+            <a:ext cx="441146" cy="369332"/>
+          </a:xfrm>
+          <a:prstGeom prst="rect">
+            <a:avLst/>
+          </a:prstGeom>
+          <a:noFill/>
+        </p:spPr>
+        <p:txBody>
+          <a:bodyPr wrap="none" rtlCol="0">
+            <a:spAutoFit/>
+          </a:bodyPr>
+          <a:lstStyle/>
+          <a:p>
+            <a:r>
+              <a:rPr lang="en-US" altLang="ko-KR" dirty="0">
+                <a:latin typeface="HelveticaNeueLT Pro 65 Md" panose="020B0604020202020204" pitchFamily="34" charset="0"/>
+              </a:rPr>
+              <a:t>(a)</a:t>
+            </a:r>
+            <a:endParaRPr lang="ko-KR" altLang="en-US" dirty="0">
+              <a:latin typeface="HelveticaNeueLT Pro 65 Md" panose="020B0604020202020204" pitchFamily="34" charset="0"/>
+            </a:endParaRPr>
+          </a:p>
+        </p:txBody>
+      </p:sp>
+      <p:sp>
+        <p:nvSpPr>
+          <p:cNvPr id="43" name="TextBox 42">
+            <a:extLst>
+              <a:ext uri="{FF2B5EF4-FFF2-40B4-BE49-F238E27FC236}">
+                <a16:creationId xmlns:a16="http://schemas.microsoft.com/office/drawing/2014/main" id="{E863CA62-EDE2-47B9-A2E5-262EF84BD45D}"/>
+              </a:ext>
+            </a:extLst>
+          </p:cNvPr>
+          <p:cNvSpPr txBox="1"/>
+          <p:nvPr/>
+        </p:nvSpPr>
+        <p:spPr>
+          <a:xfrm>
+            <a:off x="2199826" y="336074"/>
+            <a:ext cx="453970" cy="369332"/>
+          </a:xfrm>
+          <a:prstGeom prst="rect">
+            <a:avLst/>
+          </a:prstGeom>
+          <a:noFill/>
+        </p:spPr>
+        <p:txBody>
+          <a:bodyPr wrap="none" rtlCol="0">
+            <a:spAutoFit/>
+          </a:bodyPr>
+          <a:lstStyle/>
+          <a:p>
+            <a:r>
+              <a:rPr lang="en-US" altLang="ko-KR" dirty="0">
+                <a:latin typeface="HelveticaNeueLT Pro 65 Md" panose="020B0604020202020204" pitchFamily="34" charset="0"/>
+              </a:rPr>
+              <a:t>(b)</a:t>
+            </a:r>
+            <a:endParaRPr lang="ko-KR" altLang="en-US" dirty="0">
+              <a:latin typeface="HelveticaNeueLT Pro 65 Md" panose="020B0604020202020204" pitchFamily="34" charset="0"/>
+            </a:endParaRPr>
+          </a:p>
+        </p:txBody>
+      </p:sp>
+      <p:sp>
+        <p:nvSpPr>
+          <p:cNvPr id="44" name="TextBox 43">
+            <a:extLst>
+              <a:ext uri="{FF2B5EF4-FFF2-40B4-BE49-F238E27FC236}">
+                <a16:creationId xmlns:a16="http://schemas.microsoft.com/office/drawing/2014/main" id="{4892CC96-C2B5-4433-966F-AE7ED9DFE46B}"/>
+              </a:ext>
+            </a:extLst>
+          </p:cNvPr>
+          <p:cNvSpPr txBox="1"/>
+          <p:nvPr/>
+        </p:nvSpPr>
+        <p:spPr>
+          <a:xfrm>
+            <a:off x="5862000" y="336074"/>
+            <a:ext cx="441146" cy="369332"/>
+          </a:xfrm>
+          <a:prstGeom prst="rect">
+            <a:avLst/>
+          </a:prstGeom>
+          <a:noFill/>
+        </p:spPr>
+        <p:txBody>
+          <a:bodyPr wrap="none" rtlCol="0">
+            <a:spAutoFit/>
+          </a:bodyPr>
+          <a:lstStyle/>
+          <a:p>
+            <a:r>
+              <a:rPr lang="en-US" altLang="ko-KR" dirty="0">
+                <a:latin typeface="HelveticaNeueLT Pro 65 Md" panose="020B0604020202020204" pitchFamily="34" charset="0"/>
+              </a:rPr>
+              <a:t>(c)</a:t>
+            </a:r>
+            <a:endParaRPr lang="ko-KR" altLang="en-US" dirty="0">
+              <a:latin typeface="HelveticaNeueLT Pro 65 Md" panose="020B0604020202020204" pitchFamily="34" charset="0"/>
+            </a:endParaRPr>
+          </a:p>
+        </p:txBody>
+      </p:sp>
+      <p:sp>
+        <p:nvSpPr>
+          <p:cNvPr id="45" name="TextBox 44">
+            <a:extLst>
+              <a:ext uri="{FF2B5EF4-FFF2-40B4-BE49-F238E27FC236}">
+                <a16:creationId xmlns:a16="http://schemas.microsoft.com/office/drawing/2014/main" id="{BF86E81D-90C9-40BF-89CC-35E6C1245247}"/>
+              </a:ext>
+            </a:extLst>
+          </p:cNvPr>
+          <p:cNvSpPr txBox="1"/>
+          <p:nvPr/>
+        </p:nvSpPr>
+        <p:spPr>
+          <a:xfrm>
+            <a:off x="9787850" y="336074"/>
+            <a:ext cx="453970" cy="369332"/>
+          </a:xfrm>
+          <a:prstGeom prst="rect">
+            <a:avLst/>
+          </a:prstGeom>
+          <a:noFill/>
+        </p:spPr>
+        <p:txBody>
+          <a:bodyPr wrap="none" rtlCol="0">
+            <a:spAutoFit/>
+          </a:bodyPr>
+          <a:lstStyle/>
+          <a:p>
+            <a:r>
+              <a:rPr lang="en-US" altLang="ko-KR" dirty="0">
+                <a:latin typeface="HelveticaNeueLT Pro 65 Md" panose="020B0604020202020204" pitchFamily="34" charset="0"/>
+              </a:rPr>
+              <a:t>(d)</a:t>
+            </a:r>
+            <a:endParaRPr lang="ko-KR" altLang="en-US" dirty="0">
+              <a:latin typeface="HelveticaNeueLT Pro 65 Md" panose="020B0604020202020204" pitchFamily="34" charset="0"/>
+            </a:endParaRPr>
+          </a:p>
+        </p:txBody>
+      </p:sp>
+      <p:sp>
+        <p:nvSpPr>
+          <p:cNvPr id="594" name="TextBox 593">
+            <a:extLst>
+              <a:ext uri="{FF2B5EF4-FFF2-40B4-BE49-F238E27FC236}">
+                <a16:creationId xmlns:a16="http://schemas.microsoft.com/office/drawing/2014/main" id="{CB2D4003-30D8-4041-B1C3-212F4E30869B}"/>
+              </a:ext>
+            </a:extLst>
+          </p:cNvPr>
+          <p:cNvSpPr txBox="1"/>
+          <p:nvPr/>
+        </p:nvSpPr>
+        <p:spPr>
+          <a:xfrm>
+            <a:off x="-1726024" y="3331847"/>
+            <a:ext cx="441146" cy="369332"/>
+          </a:xfrm>
+          <a:prstGeom prst="rect">
+            <a:avLst/>
+          </a:prstGeom>
+          <a:noFill/>
+        </p:spPr>
+        <p:txBody>
+          <a:bodyPr wrap="none" rtlCol="0">
+            <a:spAutoFit/>
+          </a:bodyPr>
+          <a:lstStyle/>
+          <a:p>
+            <a:r>
+              <a:rPr lang="en-US" altLang="ko-KR" dirty="0">
+                <a:latin typeface="HelveticaNeueLT Pro 65 Md" panose="020B0604020202020204" pitchFamily="34" charset="0"/>
+              </a:rPr>
+              <a:t>(e)</a:t>
+            </a:r>
+            <a:endParaRPr lang="ko-KR" altLang="en-US" dirty="0">
+              <a:latin typeface="HelveticaNeueLT Pro 65 Md" panose="020B0604020202020204" pitchFamily="34" charset="0"/>
+            </a:endParaRPr>
+          </a:p>
+        </p:txBody>
+      </p:sp>
+      <p:sp>
+        <p:nvSpPr>
+          <p:cNvPr id="595" name="TextBox 594">
+            <a:extLst>
+              <a:ext uri="{FF2B5EF4-FFF2-40B4-BE49-F238E27FC236}">
+                <a16:creationId xmlns:a16="http://schemas.microsoft.com/office/drawing/2014/main" id="{26F19DFC-32AD-4D37-90C3-06D6ABB87D3A}"/>
+              </a:ext>
+            </a:extLst>
+          </p:cNvPr>
+          <p:cNvSpPr txBox="1"/>
+          <p:nvPr/>
+        </p:nvSpPr>
+        <p:spPr>
+          <a:xfrm>
+            <a:off x="2199826" y="3331847"/>
+            <a:ext cx="385042" cy="369332"/>
+          </a:xfrm>
+          <a:prstGeom prst="rect">
+            <a:avLst/>
+          </a:prstGeom>
+          <a:noFill/>
+        </p:spPr>
+        <p:txBody>
+          <a:bodyPr wrap="none" rtlCol="0">
+            <a:spAutoFit/>
+          </a:bodyPr>
+          <a:lstStyle/>
+          <a:p>
+            <a:r>
+              <a:rPr lang="en-US" altLang="ko-KR" dirty="0">
+                <a:latin typeface="HelveticaNeueLT Pro 65 Md" panose="020B0604020202020204" pitchFamily="34" charset="0"/>
+              </a:rPr>
+              <a:t>(f)</a:t>
+            </a:r>
+            <a:endParaRPr lang="ko-KR" altLang="en-US" dirty="0">
+              <a:latin typeface="HelveticaNeueLT Pro 65 Md" panose="020B0604020202020204" pitchFamily="34" charset="0"/>
+            </a:endParaRPr>
+          </a:p>
+        </p:txBody>
+      </p:sp>
+      <p:sp>
+        <p:nvSpPr>
+          <p:cNvPr id="596" name="TextBox 595">
+            <a:extLst>
+              <a:ext uri="{FF2B5EF4-FFF2-40B4-BE49-F238E27FC236}">
+                <a16:creationId xmlns:a16="http://schemas.microsoft.com/office/drawing/2014/main" id="{ADD3E605-1886-4B77-9133-15FA640725FD}"/>
+              </a:ext>
+            </a:extLst>
+          </p:cNvPr>
+          <p:cNvSpPr txBox="1"/>
+          <p:nvPr/>
+        </p:nvSpPr>
+        <p:spPr>
+          <a:xfrm>
+            <a:off x="5862000" y="3331847"/>
+            <a:ext cx="449162" cy="369332"/>
+          </a:xfrm>
+          <a:prstGeom prst="rect">
+            <a:avLst/>
+          </a:prstGeom>
+          <a:noFill/>
+        </p:spPr>
+        <p:txBody>
+          <a:bodyPr wrap="none" rtlCol="0">
+            <a:spAutoFit/>
+          </a:bodyPr>
+          <a:lstStyle/>
+          <a:p>
+            <a:r>
+              <a:rPr lang="en-US" altLang="ko-KR" dirty="0">
+                <a:latin typeface="HelveticaNeueLT Pro 65 Md" panose="020B0604020202020204" pitchFamily="34" charset="0"/>
+              </a:rPr>
+              <a:t>(g)</a:t>
+            </a:r>
+            <a:endParaRPr lang="ko-KR" altLang="en-US" dirty="0">
+              <a:latin typeface="HelveticaNeueLT Pro 65 Md" panose="020B0604020202020204" pitchFamily="34" charset="0"/>
+            </a:endParaRPr>
+          </a:p>
+        </p:txBody>
+      </p:sp>
+      <p:sp>
+        <p:nvSpPr>
+          <p:cNvPr id="597" name="TextBox 596">
+            <a:extLst>
+              <a:ext uri="{FF2B5EF4-FFF2-40B4-BE49-F238E27FC236}">
+                <a16:creationId xmlns:a16="http://schemas.microsoft.com/office/drawing/2014/main" id="{7B142467-7E4D-49FC-A30F-552CBF52E1DD}"/>
+              </a:ext>
+            </a:extLst>
+          </p:cNvPr>
+          <p:cNvSpPr txBox="1"/>
+          <p:nvPr/>
+        </p:nvSpPr>
+        <p:spPr>
+          <a:xfrm>
+            <a:off x="9787850" y="3331847"/>
+            <a:ext cx="445956" cy="369332"/>
+          </a:xfrm>
+          <a:prstGeom prst="rect">
+            <a:avLst/>
+          </a:prstGeom>
+          <a:noFill/>
+        </p:spPr>
+        <p:txBody>
+          <a:bodyPr wrap="none" rtlCol="0">
+            <a:spAutoFit/>
+          </a:bodyPr>
+          <a:lstStyle/>
+          <a:p>
+            <a:r>
+              <a:rPr lang="en-US" altLang="ko-KR" dirty="0">
+                <a:latin typeface="HelveticaNeueLT Pro 65 Md" panose="020B0604020202020204" pitchFamily="34" charset="0"/>
+              </a:rPr>
+              <a:t>(h)</a:t>
+            </a:r>
+            <a:endParaRPr lang="ko-KR" altLang="en-US" dirty="0">
+              <a:latin typeface="HelveticaNeueLT Pro 65 Md" panose="020B0604020202020204" pitchFamily="34" charset="0"/>
+            </a:endParaRPr>
+          </a:p>
+        </p:txBody>
+      </p:sp>
+    </p:spTree>
+    <p:extLst>
+      <p:ext uri="{BB962C8B-B14F-4D97-AF65-F5344CB8AC3E}">
+        <p14:creationId xmlns:p14="http://schemas.microsoft.com/office/powerpoint/2010/main" val="1421583071"/>
+      </p:ext>
+    </p:extLst>
+  </p:cSld>
+  <p:clrMapOvr>
+    <a:masterClrMapping/>
+  </p:clrMapOvr>
+</p:sld>
+</file>
+
 <file path=ppt/theme/theme1.xml><?xml version="1.0" encoding="utf-8"?>
 <a:theme xmlns:a="http://schemas.openxmlformats.org/drawingml/2006/main" name="Office 테마">
   <a:themeElements>
